--- a/m4310/Ch4.pptx
+++ b/m4310/Ch4.pptx
@@ -19,6 +19,8 @@
     <p:sldId id="311" r:id="rId13"/>
     <p:sldId id="312" r:id="rId14"/>
     <p:sldId id="313" r:id="rId15"/>
+    <p:sldId id="314" r:id="rId16"/>
+    <p:sldId id="342" r:id="rId17"/>
   </p:sldIdLst>
   <p:sldSz cx="12192000" cy="6858000"/>
   <p:notesSz cx="6858000" cy="9144000"/>
@@ -128,7 +130,7 @@
 <file path=ppt/revisionInfo.xml><?xml version="1.0" encoding="utf-8"?>
 <p1510:revInfo xmlns:a="http://schemas.openxmlformats.org/drawingml/2006/main" xmlns:r="http://schemas.openxmlformats.org/officeDocument/2006/relationships" xmlns:p1510="http://schemas.microsoft.com/office/powerpoint/2015/10/main">
   <p1510:revLst>
-    <p1510:client id="{9D50EA7C-F754-BC49-A4BE-2DAD1179D7AC}" v="65" dt="2026-10-15T01:25:28.247"/>
+    <p1510:client id="{9D50EA7C-F754-BC49-A4BE-2DAD1179D7AC}" v="71" dt="2026-10-18T18:50:14.263"/>
   </p1510:revLst>
 </p1510:revInfo>
 </file>
@@ -138,7 +140,7 @@
   <pc:docChgLst>
     <pc:chgData name="Min Wang" userId="40c509f2-6e44-41ac-be95-0b697891d3eb" providerId="ADAL" clId="{1E82F5CA-06CB-5569-B40B-7CFA0163A4AB}"/>
     <pc:docChg chg="undo custSel addSld delSld modSld">
-      <pc:chgData name="Min Wang" userId="40c509f2-6e44-41ac-be95-0b697891d3eb" providerId="ADAL" clId="{1E82F5CA-06CB-5569-B40B-7CFA0163A4AB}" dt="2026-10-15T01:28:26.467" v="736" actId="2696"/>
+      <pc:chgData name="Min Wang" userId="40c509f2-6e44-41ac-be95-0b697891d3eb" providerId="ADAL" clId="{1E82F5CA-06CB-5569-B40B-7CFA0163A4AB}" dt="2026-10-18T18:50:42.701" v="780" actId="2696"/>
       <pc:docMkLst>
         <pc:docMk/>
       </pc:docMkLst>
@@ -156,13 +158,6 @@
             <ac:spMk id="2" creationId="{7D6FED06-E9C4-21C5-C760-6FE50ADBC0F6}"/>
           </ac:spMkLst>
         </pc:spChg>
-      </pc:sldChg>
-      <pc:sldChg chg="del">
-        <pc:chgData name="Min Wang" userId="40c509f2-6e44-41ac-be95-0b697891d3eb" providerId="ADAL" clId="{1E82F5CA-06CB-5569-B40B-7CFA0163A4AB}" dt="2026-10-15T00:41:57.340" v="517" actId="2696"/>
-        <pc:sldMkLst>
-          <pc:docMk/>
-          <pc:sldMk cId="3197488510" sldId="300"/>
-        </pc:sldMkLst>
       </pc:sldChg>
       <pc:sldChg chg="addSp modSp mod">
         <pc:chgData name="Min Wang" userId="40c509f2-6e44-41ac-be95-0b697891d3eb" providerId="ADAL" clId="{1E82F5CA-06CB-5569-B40B-7CFA0163A4AB}" dt="2026-10-15T00:54:27.134" v="539" actId="1076"/>
@@ -452,14 +447,6 @@
           <pc:docMk/>
           <pc:sldMk cId="2115032359" sldId="307"/>
         </pc:sldMkLst>
-        <pc:spChg chg="add del mod">
-          <ac:chgData name="Min Wang" userId="40c509f2-6e44-41ac-be95-0b697891d3eb" providerId="ADAL" clId="{1E82F5CA-06CB-5569-B40B-7CFA0163A4AB}" dt="2026-10-15T01:09:05.167" v="635" actId="478"/>
-          <ac:spMkLst>
-            <pc:docMk/>
-            <pc:sldMk cId="2115032359" sldId="307"/>
-            <ac:spMk id="4" creationId="{B8488125-1CEC-7DDE-2A49-A67161ED20C9}"/>
-          </ac:spMkLst>
-        </pc:spChg>
         <pc:spChg chg="add mod">
           <ac:chgData name="Min Wang" userId="40c509f2-6e44-41ac-be95-0b697891d3eb" providerId="ADAL" clId="{1E82F5CA-06CB-5569-B40B-7CFA0163A4AB}" dt="2026-10-15T01:09:11.806" v="638" actId="20577"/>
           <ac:spMkLst>
@@ -482,22 +469,6 @@
             <pc:docMk/>
             <pc:sldMk cId="2115032359" sldId="307"/>
             <ac:picMk id="7" creationId="{8F92A7E5-4E11-24BC-1D15-B8FB6574B892}"/>
-          </ac:picMkLst>
-        </pc:picChg>
-        <pc:picChg chg="add del mod">
-          <ac:chgData name="Min Wang" userId="40c509f2-6e44-41ac-be95-0b697891d3eb" providerId="ADAL" clId="{1E82F5CA-06CB-5569-B40B-7CFA0163A4AB}" dt="2026-10-15T01:10:22.920" v="645" actId="21"/>
-          <ac:picMkLst>
-            <pc:docMk/>
-            <pc:sldMk cId="2115032359" sldId="307"/>
-            <ac:picMk id="8" creationId="{6A8B4AAD-C5DB-F469-47DD-F2F7983DD2DE}"/>
-          </ac:picMkLst>
-        </pc:picChg>
-        <pc:picChg chg="add del mod">
-          <ac:chgData name="Min Wang" userId="40c509f2-6e44-41ac-be95-0b697891d3eb" providerId="ADAL" clId="{1E82F5CA-06CB-5569-B40B-7CFA0163A4AB}" dt="2026-10-15T01:10:22.920" v="645" actId="21"/>
-          <ac:picMkLst>
-            <pc:docMk/>
-            <pc:sldMk cId="2115032359" sldId="307"/>
-            <ac:picMk id="9" creationId="{96355A6D-92C8-2E99-E151-61677489A6F8}"/>
           </ac:picMkLst>
         </pc:picChg>
       </pc:sldChg>
@@ -570,14 +541,6 @@
           <pc:docMk/>
           <pc:sldMk cId="3120640261" sldId="309"/>
         </pc:sldMkLst>
-        <pc:spChg chg="add del mod">
-          <ac:chgData name="Min Wang" userId="40c509f2-6e44-41ac-be95-0b697891d3eb" providerId="ADAL" clId="{1E82F5CA-06CB-5569-B40B-7CFA0163A4AB}" dt="2026-10-15T01:13:30.195" v="665" actId="478"/>
-          <ac:spMkLst>
-            <pc:docMk/>
-            <pc:sldMk cId="3120640261" sldId="309"/>
-            <ac:spMk id="4" creationId="{3A6147F1-BDD0-EDCA-AE26-4CBC8B59F073}"/>
-          </ac:spMkLst>
-        </pc:spChg>
         <pc:picChg chg="add mod">
           <ac:chgData name="Min Wang" userId="40c509f2-6e44-41ac-be95-0b697891d3eb" providerId="ADAL" clId="{1E82F5CA-06CB-5569-B40B-7CFA0163A4AB}" dt="2026-10-15T01:12:12.475" v="659" actId="1076"/>
           <ac:picMkLst>
@@ -793,7 +756,7 @@
         </pc:picChg>
       </pc:sldChg>
       <pc:sldChg chg="addSp modSp mod modAnim">
-        <pc:chgData name="Min Wang" userId="40c509f2-6e44-41ac-be95-0b697891d3eb" providerId="ADAL" clId="{1E82F5CA-06CB-5569-B40B-7CFA0163A4AB}" dt="2026-10-15T01:25:28.247" v="735"/>
+        <pc:chgData name="Min Wang" userId="40c509f2-6e44-41ac-be95-0b697891d3eb" providerId="ADAL" clId="{1E82F5CA-06CB-5569-B40B-7CFA0163A4AB}" dt="2026-10-18T18:46:06.178" v="741" actId="1076"/>
         <pc:sldMkLst>
           <pc:docMk/>
           <pc:sldMk cId="1607324547" sldId="313"/>
@@ -822,208 +785,257 @@
             <ac:picMk id="4" creationId="{71E92BE9-227E-4D83-88C5-D08A30057E76}"/>
           </ac:picMkLst>
         </pc:picChg>
+        <pc:picChg chg="add mod">
+          <ac:chgData name="Min Wang" userId="40c509f2-6e44-41ac-be95-0b697891d3eb" providerId="ADAL" clId="{1E82F5CA-06CB-5569-B40B-7CFA0163A4AB}" dt="2026-10-18T18:46:01.042" v="740" actId="1076"/>
+          <ac:picMkLst>
+            <pc:docMk/>
+            <pc:sldMk cId="1607324547" sldId="313"/>
+            <ac:picMk id="5" creationId="{ADAB8061-CB8B-3A12-9F38-18AEE923944F}"/>
+          </ac:picMkLst>
+        </pc:picChg>
+        <pc:picChg chg="add mod">
+          <ac:chgData name="Min Wang" userId="40c509f2-6e44-41ac-be95-0b697891d3eb" providerId="ADAL" clId="{1E82F5CA-06CB-5569-B40B-7CFA0163A4AB}" dt="2026-10-18T18:46:06.178" v="741" actId="1076"/>
+          <ac:picMkLst>
+            <pc:docMk/>
+            <pc:sldMk cId="1607324547" sldId="313"/>
+            <ac:picMk id="6" creationId="{CA03CCCE-C115-CFF4-681C-E5938498C163}"/>
+          </ac:picMkLst>
+        </pc:picChg>
       </pc:sldChg>
-      <pc:sldChg chg="del">
-        <pc:chgData name="Min Wang" userId="40c509f2-6e44-41ac-be95-0b697891d3eb" providerId="ADAL" clId="{1E82F5CA-06CB-5569-B40B-7CFA0163A4AB}" dt="2026-10-15T01:28:26.467" v="736" actId="2696"/>
+      <pc:sldChg chg="addSp modSp mod">
+        <pc:chgData name="Min Wang" userId="40c509f2-6e44-41ac-be95-0b697891d3eb" providerId="ADAL" clId="{1E82F5CA-06CB-5569-B40B-7CFA0163A4AB}" dt="2026-10-18T18:50:16.127" v="753" actId="1076"/>
         <pc:sldMkLst>
           <pc:docMk/>
           <pc:sldMk cId="336904915" sldId="314"/>
         </pc:sldMkLst>
+        <pc:picChg chg="add mod">
+          <ac:chgData name="Min Wang" userId="40c509f2-6e44-41ac-be95-0b697891d3eb" providerId="ADAL" clId="{1E82F5CA-06CB-5569-B40B-7CFA0163A4AB}" dt="2026-10-18T18:48:26.552" v="744" actId="14100"/>
+          <ac:picMkLst>
+            <pc:docMk/>
+            <pc:sldMk cId="336904915" sldId="314"/>
+            <ac:picMk id="2" creationId="{634D5A7B-B48C-B681-5217-34F5BFB80D59}"/>
+          </ac:picMkLst>
+        </pc:picChg>
+        <pc:picChg chg="add mod">
+          <ac:chgData name="Min Wang" userId="40c509f2-6e44-41ac-be95-0b697891d3eb" providerId="ADAL" clId="{1E82F5CA-06CB-5569-B40B-7CFA0163A4AB}" dt="2026-10-18T18:49:41.575" v="749" actId="1076"/>
+          <ac:picMkLst>
+            <pc:docMk/>
+            <pc:sldMk cId="336904915" sldId="314"/>
+            <ac:picMk id="3" creationId="{AF579BA5-9210-1CC9-4559-5983847BAC38}"/>
+          </ac:picMkLst>
+        </pc:picChg>
+        <pc:picChg chg="add mod">
+          <ac:chgData name="Min Wang" userId="40c509f2-6e44-41ac-be95-0b697891d3eb" providerId="ADAL" clId="{1E82F5CA-06CB-5569-B40B-7CFA0163A4AB}" dt="2026-10-18T18:49:39.836" v="748" actId="1076"/>
+          <ac:picMkLst>
+            <pc:docMk/>
+            <pc:sldMk cId="336904915" sldId="314"/>
+            <ac:picMk id="4" creationId="{890BB9B1-1245-FF60-778A-27AA8E358FEC}"/>
+          </ac:picMkLst>
+        </pc:picChg>
+        <pc:picChg chg="add mod">
+          <ac:chgData name="Min Wang" userId="40c509f2-6e44-41ac-be95-0b697891d3eb" providerId="ADAL" clId="{1E82F5CA-06CB-5569-B40B-7CFA0163A4AB}" dt="2026-10-18T18:50:06.866" v="751" actId="1076"/>
+          <ac:picMkLst>
+            <pc:docMk/>
+            <pc:sldMk cId="336904915" sldId="314"/>
+            <ac:picMk id="5" creationId="{09941775-267B-23C3-C6A4-209581BD1392}"/>
+          </ac:picMkLst>
+        </pc:picChg>
+        <pc:picChg chg="add mod">
+          <ac:chgData name="Min Wang" userId="40c509f2-6e44-41ac-be95-0b697891d3eb" providerId="ADAL" clId="{1E82F5CA-06CB-5569-B40B-7CFA0163A4AB}" dt="2026-10-18T18:50:16.127" v="753" actId="1076"/>
+          <ac:picMkLst>
+            <pc:docMk/>
+            <pc:sldMk cId="336904915" sldId="314"/>
+            <ac:picMk id="6" creationId="{D9858550-E270-20BD-4040-8D7DE5A2E754}"/>
+          </ac:picMkLst>
+        </pc:picChg>
       </pc:sldChg>
       <pc:sldChg chg="del">
-        <pc:chgData name="Min Wang" userId="40c509f2-6e44-41ac-be95-0b697891d3eb" providerId="ADAL" clId="{1E82F5CA-06CB-5569-B40B-7CFA0163A4AB}" dt="2026-10-15T01:28:26.467" v="736" actId="2696"/>
+        <pc:chgData name="Min Wang" userId="40c509f2-6e44-41ac-be95-0b697891d3eb" providerId="ADAL" clId="{1E82F5CA-06CB-5569-B40B-7CFA0163A4AB}" dt="2026-10-18T18:50:42.683" v="754" actId="2696"/>
         <pc:sldMkLst>
           <pc:docMk/>
           <pc:sldMk cId="4277801599" sldId="315"/>
         </pc:sldMkLst>
       </pc:sldChg>
       <pc:sldChg chg="del">
-        <pc:chgData name="Min Wang" userId="40c509f2-6e44-41ac-be95-0b697891d3eb" providerId="ADAL" clId="{1E82F5CA-06CB-5569-B40B-7CFA0163A4AB}" dt="2026-10-15T01:28:26.467" v="736" actId="2696"/>
+        <pc:chgData name="Min Wang" userId="40c509f2-6e44-41ac-be95-0b697891d3eb" providerId="ADAL" clId="{1E82F5CA-06CB-5569-B40B-7CFA0163A4AB}" dt="2026-10-18T18:50:42.690" v="764" actId="2696"/>
         <pc:sldMkLst>
           <pc:docMk/>
           <pc:sldMk cId="3934468289" sldId="316"/>
         </pc:sldMkLst>
       </pc:sldChg>
       <pc:sldChg chg="del">
-        <pc:chgData name="Min Wang" userId="40c509f2-6e44-41ac-be95-0b697891d3eb" providerId="ADAL" clId="{1E82F5CA-06CB-5569-B40B-7CFA0163A4AB}" dt="2026-10-15T01:28:26.467" v="736" actId="2696"/>
+        <pc:chgData name="Min Wang" userId="40c509f2-6e44-41ac-be95-0b697891d3eb" providerId="ADAL" clId="{1E82F5CA-06CB-5569-B40B-7CFA0163A4AB}" dt="2026-10-18T18:50:42.686" v="760" actId="2696"/>
         <pc:sldMkLst>
           <pc:docMk/>
           <pc:sldMk cId="3595205882" sldId="317"/>
         </pc:sldMkLst>
       </pc:sldChg>
       <pc:sldChg chg="del">
-        <pc:chgData name="Min Wang" userId="40c509f2-6e44-41ac-be95-0b697891d3eb" providerId="ADAL" clId="{1E82F5CA-06CB-5569-B40B-7CFA0163A4AB}" dt="2026-10-15T01:28:26.467" v="736" actId="2696"/>
+        <pc:chgData name="Min Wang" userId="40c509f2-6e44-41ac-be95-0b697891d3eb" providerId="ADAL" clId="{1E82F5CA-06CB-5569-B40B-7CFA0163A4AB}" dt="2026-10-18T18:50:42.696" v="775" actId="2696"/>
         <pc:sldMkLst>
           <pc:docMk/>
           <pc:sldMk cId="1073559938" sldId="318"/>
         </pc:sldMkLst>
       </pc:sldChg>
       <pc:sldChg chg="del">
-        <pc:chgData name="Min Wang" userId="40c509f2-6e44-41ac-be95-0b697891d3eb" providerId="ADAL" clId="{1E82F5CA-06CB-5569-B40B-7CFA0163A4AB}" dt="2026-10-15T01:28:26.467" v="736" actId="2696"/>
+        <pc:chgData name="Min Wang" userId="40c509f2-6e44-41ac-be95-0b697891d3eb" providerId="ADAL" clId="{1E82F5CA-06CB-5569-B40B-7CFA0163A4AB}" dt="2026-10-18T18:50:42.699" v="779" actId="2696"/>
         <pc:sldMkLst>
           <pc:docMk/>
           <pc:sldMk cId="1219657220" sldId="319"/>
         </pc:sldMkLst>
       </pc:sldChg>
       <pc:sldChg chg="del">
-        <pc:chgData name="Min Wang" userId="40c509f2-6e44-41ac-be95-0b697891d3eb" providerId="ADAL" clId="{1E82F5CA-06CB-5569-B40B-7CFA0163A4AB}" dt="2026-10-15T01:28:26.467" v="736" actId="2696"/>
+        <pc:chgData name="Min Wang" userId="40c509f2-6e44-41ac-be95-0b697891d3eb" providerId="ADAL" clId="{1E82F5CA-06CB-5569-B40B-7CFA0163A4AB}" dt="2026-10-18T18:50:42.694" v="772" actId="2696"/>
         <pc:sldMkLst>
           <pc:docMk/>
           <pc:sldMk cId="1004969257" sldId="320"/>
         </pc:sldMkLst>
       </pc:sldChg>
       <pc:sldChg chg="del">
-        <pc:chgData name="Min Wang" userId="40c509f2-6e44-41ac-be95-0b697891d3eb" providerId="ADAL" clId="{1E82F5CA-06CB-5569-B40B-7CFA0163A4AB}" dt="2026-10-15T01:28:26.467" v="736" actId="2696"/>
+        <pc:chgData name="Min Wang" userId="40c509f2-6e44-41ac-be95-0b697891d3eb" providerId="ADAL" clId="{1E82F5CA-06CB-5569-B40B-7CFA0163A4AB}" dt="2026-10-18T18:50:42.688" v="763" actId="2696"/>
         <pc:sldMkLst>
           <pc:docMk/>
           <pc:sldMk cId="2354844511" sldId="321"/>
         </pc:sldMkLst>
       </pc:sldChg>
       <pc:sldChg chg="del">
-        <pc:chgData name="Min Wang" userId="40c509f2-6e44-41ac-be95-0b697891d3eb" providerId="ADAL" clId="{1E82F5CA-06CB-5569-B40B-7CFA0163A4AB}" dt="2026-10-15T01:28:26.467" v="736" actId="2696"/>
+        <pc:chgData name="Min Wang" userId="40c509f2-6e44-41ac-be95-0b697891d3eb" providerId="ADAL" clId="{1E82F5CA-06CB-5569-B40B-7CFA0163A4AB}" dt="2026-10-18T18:50:42.687" v="761" actId="2696"/>
         <pc:sldMkLst>
           <pc:docMk/>
           <pc:sldMk cId="3790483184" sldId="322"/>
         </pc:sldMkLst>
       </pc:sldChg>
       <pc:sldChg chg="del">
-        <pc:chgData name="Min Wang" userId="40c509f2-6e44-41ac-be95-0b697891d3eb" providerId="ADAL" clId="{1E82F5CA-06CB-5569-B40B-7CFA0163A4AB}" dt="2026-10-15T01:28:26.467" v="736" actId="2696"/>
+        <pc:chgData name="Min Wang" userId="40c509f2-6e44-41ac-be95-0b697891d3eb" providerId="ADAL" clId="{1E82F5CA-06CB-5569-B40B-7CFA0163A4AB}" dt="2026-10-18T18:50:42.692" v="769" actId="2696"/>
         <pc:sldMkLst>
           <pc:docMk/>
           <pc:sldMk cId="2515535923" sldId="323"/>
         </pc:sldMkLst>
       </pc:sldChg>
       <pc:sldChg chg="del">
-        <pc:chgData name="Min Wang" userId="40c509f2-6e44-41ac-be95-0b697891d3eb" providerId="ADAL" clId="{1E82F5CA-06CB-5569-B40B-7CFA0163A4AB}" dt="2026-10-15T01:28:26.467" v="736" actId="2696"/>
+        <pc:chgData name="Min Wang" userId="40c509f2-6e44-41ac-be95-0b697891d3eb" providerId="ADAL" clId="{1E82F5CA-06CB-5569-B40B-7CFA0163A4AB}" dt="2026-10-18T18:50:42.693" v="771" actId="2696"/>
         <pc:sldMkLst>
           <pc:docMk/>
           <pc:sldMk cId="546914569" sldId="324"/>
         </pc:sldMkLst>
       </pc:sldChg>
       <pc:sldChg chg="del">
-        <pc:chgData name="Min Wang" userId="40c509f2-6e44-41ac-be95-0b697891d3eb" providerId="ADAL" clId="{1E82F5CA-06CB-5569-B40B-7CFA0163A4AB}" dt="2026-10-15T01:28:26.467" v="736" actId="2696"/>
+        <pc:chgData name="Min Wang" userId="40c509f2-6e44-41ac-be95-0b697891d3eb" providerId="ADAL" clId="{1E82F5CA-06CB-5569-B40B-7CFA0163A4AB}" dt="2026-10-18T18:50:42.691" v="767" actId="2696"/>
         <pc:sldMkLst>
           <pc:docMk/>
           <pc:sldMk cId="1670624368" sldId="325"/>
         </pc:sldMkLst>
       </pc:sldChg>
       <pc:sldChg chg="del">
-        <pc:chgData name="Min Wang" userId="40c509f2-6e44-41ac-be95-0b697891d3eb" providerId="ADAL" clId="{1E82F5CA-06CB-5569-B40B-7CFA0163A4AB}" dt="2026-10-15T01:28:26.467" v="736" actId="2696"/>
+        <pc:chgData name="Min Wang" userId="40c509f2-6e44-41ac-be95-0b697891d3eb" providerId="ADAL" clId="{1E82F5CA-06CB-5569-B40B-7CFA0163A4AB}" dt="2026-10-18T18:50:42.687" v="762" actId="2696"/>
         <pc:sldMkLst>
           <pc:docMk/>
           <pc:sldMk cId="988826137" sldId="326"/>
         </pc:sldMkLst>
       </pc:sldChg>
       <pc:sldChg chg="del">
-        <pc:chgData name="Min Wang" userId="40c509f2-6e44-41ac-be95-0b697891d3eb" providerId="ADAL" clId="{1E82F5CA-06CB-5569-B40B-7CFA0163A4AB}" dt="2026-10-15T01:28:26.467" v="736" actId="2696"/>
+        <pc:chgData name="Min Wang" userId="40c509f2-6e44-41ac-be95-0b697891d3eb" providerId="ADAL" clId="{1E82F5CA-06CB-5569-B40B-7CFA0163A4AB}" dt="2026-10-18T18:50:42.690" v="765" actId="2696"/>
         <pc:sldMkLst>
           <pc:docMk/>
           <pc:sldMk cId="3661159635" sldId="327"/>
         </pc:sldMkLst>
       </pc:sldChg>
       <pc:sldChg chg="del">
-        <pc:chgData name="Min Wang" userId="40c509f2-6e44-41ac-be95-0b697891d3eb" providerId="ADAL" clId="{1E82F5CA-06CB-5569-B40B-7CFA0163A4AB}" dt="2026-10-15T01:28:26.467" v="736" actId="2696"/>
+        <pc:chgData name="Min Wang" userId="40c509f2-6e44-41ac-be95-0b697891d3eb" providerId="ADAL" clId="{1E82F5CA-06CB-5569-B40B-7CFA0163A4AB}" dt="2026-10-18T18:50:42.697" v="776" actId="2696"/>
         <pc:sldMkLst>
           <pc:docMk/>
           <pc:sldMk cId="1534147969" sldId="328"/>
         </pc:sldMkLst>
       </pc:sldChg>
       <pc:sldChg chg="del">
-        <pc:chgData name="Min Wang" userId="40c509f2-6e44-41ac-be95-0b697891d3eb" providerId="ADAL" clId="{1E82F5CA-06CB-5569-B40B-7CFA0163A4AB}" dt="2026-10-15T01:28:26.467" v="736" actId="2696"/>
+        <pc:chgData name="Min Wang" userId="40c509f2-6e44-41ac-be95-0b697891d3eb" providerId="ADAL" clId="{1E82F5CA-06CB-5569-B40B-7CFA0163A4AB}" dt="2026-10-18T18:50:42.685" v="758" actId="2696"/>
         <pc:sldMkLst>
           <pc:docMk/>
           <pc:sldMk cId="2756325201" sldId="329"/>
         </pc:sldMkLst>
       </pc:sldChg>
       <pc:sldChg chg="del">
-        <pc:chgData name="Min Wang" userId="40c509f2-6e44-41ac-be95-0b697891d3eb" providerId="ADAL" clId="{1E82F5CA-06CB-5569-B40B-7CFA0163A4AB}" dt="2026-10-15T01:28:26.467" v="736" actId="2696"/>
+        <pc:chgData name="Min Wang" userId="40c509f2-6e44-41ac-be95-0b697891d3eb" providerId="ADAL" clId="{1E82F5CA-06CB-5569-B40B-7CFA0163A4AB}" dt="2026-10-18T18:50:42.698" v="778" actId="2696"/>
         <pc:sldMkLst>
           <pc:docMk/>
           <pc:sldMk cId="2070885701" sldId="330"/>
         </pc:sldMkLst>
       </pc:sldChg>
       <pc:sldChg chg="del">
-        <pc:chgData name="Min Wang" userId="40c509f2-6e44-41ac-be95-0b697891d3eb" providerId="ADAL" clId="{1E82F5CA-06CB-5569-B40B-7CFA0163A4AB}" dt="2026-10-15T01:28:26.467" v="736" actId="2696"/>
+        <pc:chgData name="Min Wang" userId="40c509f2-6e44-41ac-be95-0b697891d3eb" providerId="ADAL" clId="{1E82F5CA-06CB-5569-B40B-7CFA0163A4AB}" dt="2026-10-18T18:50:42.691" v="766" actId="2696"/>
         <pc:sldMkLst>
           <pc:docMk/>
           <pc:sldMk cId="4191250955" sldId="331"/>
         </pc:sldMkLst>
       </pc:sldChg>
       <pc:sldChg chg="del">
-        <pc:chgData name="Min Wang" userId="40c509f2-6e44-41ac-be95-0b697891d3eb" providerId="ADAL" clId="{1E82F5CA-06CB-5569-B40B-7CFA0163A4AB}" dt="2026-10-15T01:28:26.467" v="736" actId="2696"/>
+        <pc:chgData name="Min Wang" userId="40c509f2-6e44-41ac-be95-0b697891d3eb" providerId="ADAL" clId="{1E82F5CA-06CB-5569-B40B-7CFA0163A4AB}" dt="2026-10-18T18:50:42.693" v="770" actId="2696"/>
         <pc:sldMkLst>
           <pc:docMk/>
           <pc:sldMk cId="408675027" sldId="332"/>
         </pc:sldMkLst>
       </pc:sldChg>
       <pc:sldChg chg="del">
-        <pc:chgData name="Min Wang" userId="40c509f2-6e44-41ac-be95-0b697891d3eb" providerId="ADAL" clId="{1E82F5CA-06CB-5569-B40B-7CFA0163A4AB}" dt="2026-10-15T01:28:26.467" v="736" actId="2696"/>
+        <pc:chgData name="Min Wang" userId="40c509f2-6e44-41ac-be95-0b697891d3eb" providerId="ADAL" clId="{1E82F5CA-06CB-5569-B40B-7CFA0163A4AB}" dt="2026-10-18T18:50:42.684" v="756" actId="2696"/>
         <pc:sldMkLst>
           <pc:docMk/>
           <pc:sldMk cId="816109718" sldId="333"/>
         </pc:sldMkLst>
       </pc:sldChg>
       <pc:sldChg chg="del">
-        <pc:chgData name="Min Wang" userId="40c509f2-6e44-41ac-be95-0b697891d3eb" providerId="ADAL" clId="{1E82F5CA-06CB-5569-B40B-7CFA0163A4AB}" dt="2026-10-15T01:28:26.467" v="736" actId="2696"/>
+        <pc:chgData name="Min Wang" userId="40c509f2-6e44-41ac-be95-0b697891d3eb" providerId="ADAL" clId="{1E82F5CA-06CB-5569-B40B-7CFA0163A4AB}" dt="2026-10-18T18:50:42.684" v="755" actId="2696"/>
         <pc:sldMkLst>
           <pc:docMk/>
           <pc:sldMk cId="3441448302" sldId="334"/>
         </pc:sldMkLst>
       </pc:sldChg>
       <pc:sldChg chg="del">
-        <pc:chgData name="Min Wang" userId="40c509f2-6e44-41ac-be95-0b697891d3eb" providerId="ADAL" clId="{1E82F5CA-06CB-5569-B40B-7CFA0163A4AB}" dt="2026-10-15T01:28:26.467" v="736" actId="2696"/>
+        <pc:chgData name="Min Wang" userId="40c509f2-6e44-41ac-be95-0b697891d3eb" providerId="ADAL" clId="{1E82F5CA-06CB-5569-B40B-7CFA0163A4AB}" dt="2026-10-18T18:50:42.686" v="759" actId="2696"/>
         <pc:sldMkLst>
           <pc:docMk/>
           <pc:sldMk cId="845968809" sldId="335"/>
         </pc:sldMkLst>
       </pc:sldChg>
       <pc:sldChg chg="del">
-        <pc:chgData name="Min Wang" userId="40c509f2-6e44-41ac-be95-0b697891d3eb" providerId="ADAL" clId="{1E82F5CA-06CB-5569-B40B-7CFA0163A4AB}" dt="2026-10-15T01:28:26.467" v="736" actId="2696"/>
+        <pc:chgData name="Min Wang" userId="40c509f2-6e44-41ac-be95-0b697891d3eb" providerId="ADAL" clId="{1E82F5CA-06CB-5569-B40B-7CFA0163A4AB}" dt="2026-10-18T18:50:42.694" v="773" actId="2696"/>
         <pc:sldMkLst>
           <pc:docMk/>
           <pc:sldMk cId="3433507932" sldId="336"/>
         </pc:sldMkLst>
       </pc:sldChg>
       <pc:sldChg chg="del">
-        <pc:chgData name="Min Wang" userId="40c509f2-6e44-41ac-be95-0b697891d3eb" providerId="ADAL" clId="{1E82F5CA-06CB-5569-B40B-7CFA0163A4AB}" dt="2026-10-15T01:28:26.467" v="736" actId="2696"/>
+        <pc:chgData name="Min Wang" userId="40c509f2-6e44-41ac-be95-0b697891d3eb" providerId="ADAL" clId="{1E82F5CA-06CB-5569-B40B-7CFA0163A4AB}" dt="2026-10-18T18:50:42.697" v="777" actId="2696"/>
         <pc:sldMkLst>
           <pc:docMk/>
           <pc:sldMk cId="4188990906" sldId="337"/>
         </pc:sldMkLst>
       </pc:sldChg>
       <pc:sldChg chg="del">
-        <pc:chgData name="Min Wang" userId="40c509f2-6e44-41ac-be95-0b697891d3eb" providerId="ADAL" clId="{1E82F5CA-06CB-5569-B40B-7CFA0163A4AB}" dt="2026-10-15T01:28:26.467" v="736" actId="2696"/>
+        <pc:chgData name="Min Wang" userId="40c509f2-6e44-41ac-be95-0b697891d3eb" providerId="ADAL" clId="{1E82F5CA-06CB-5569-B40B-7CFA0163A4AB}" dt="2026-10-18T18:50:42.701" v="780" actId="2696"/>
         <pc:sldMkLst>
           <pc:docMk/>
           <pc:sldMk cId="102027501" sldId="338"/>
         </pc:sldMkLst>
       </pc:sldChg>
       <pc:sldChg chg="del">
-        <pc:chgData name="Min Wang" userId="40c509f2-6e44-41ac-be95-0b697891d3eb" providerId="ADAL" clId="{1E82F5CA-06CB-5569-B40B-7CFA0163A4AB}" dt="2026-10-15T01:28:26.467" v="736" actId="2696"/>
+        <pc:chgData name="Min Wang" userId="40c509f2-6e44-41ac-be95-0b697891d3eb" providerId="ADAL" clId="{1E82F5CA-06CB-5569-B40B-7CFA0163A4AB}" dt="2026-10-18T18:50:42.694" v="774" actId="2696"/>
         <pc:sldMkLst>
           <pc:docMk/>
           <pc:sldMk cId="966194257" sldId="339"/>
         </pc:sldMkLst>
       </pc:sldChg>
       <pc:sldChg chg="del">
-        <pc:chgData name="Min Wang" userId="40c509f2-6e44-41ac-be95-0b697891d3eb" providerId="ADAL" clId="{1E82F5CA-06CB-5569-B40B-7CFA0163A4AB}" dt="2026-10-15T01:28:26.467" v="736" actId="2696"/>
+        <pc:chgData name="Min Wang" userId="40c509f2-6e44-41ac-be95-0b697891d3eb" providerId="ADAL" clId="{1E82F5CA-06CB-5569-B40B-7CFA0163A4AB}" dt="2026-10-18T18:50:42.692" v="768" actId="2696"/>
         <pc:sldMkLst>
           <pc:docMk/>
           <pc:sldMk cId="3160995355" sldId="340"/>
         </pc:sldMkLst>
       </pc:sldChg>
       <pc:sldChg chg="del">
-        <pc:chgData name="Min Wang" userId="40c509f2-6e44-41ac-be95-0b697891d3eb" providerId="ADAL" clId="{1E82F5CA-06CB-5569-B40B-7CFA0163A4AB}" dt="2026-10-15T01:28:26.467" v="736" actId="2696"/>
+        <pc:chgData name="Min Wang" userId="40c509f2-6e44-41ac-be95-0b697891d3eb" providerId="ADAL" clId="{1E82F5CA-06CB-5569-B40B-7CFA0163A4AB}" dt="2026-10-18T18:50:42.685" v="757" actId="2696"/>
         <pc:sldMkLst>
           <pc:docMk/>
           <pc:sldMk cId="2660113598" sldId="341"/>
-        </pc:sldMkLst>
-      </pc:sldChg>
-      <pc:sldChg chg="del">
-        <pc:chgData name="Min Wang" userId="40c509f2-6e44-41ac-be95-0b697891d3eb" providerId="ADAL" clId="{1E82F5CA-06CB-5569-B40B-7CFA0163A4AB}" dt="2026-10-15T01:28:26.467" v="736" actId="2696"/>
-        <pc:sldMkLst>
-          <pc:docMk/>
-          <pc:sldMk cId="3191824321" sldId="342"/>
         </pc:sldMkLst>
       </pc:sldChg>
     </pc:docChg>
@@ -1374,7 +1386,7 @@
           <a:p>
             <a:fld id="{75E77AAE-2F44-5C47-B387-1EEC3C22D174}" type="datetimeFigureOut">
               <a:rPr lang="en-US" smtClean="0"/>
-              <a:t>10/14/26</a:t>
+              <a:t>10/18/26</a:t>
             </a:fld>
             <a:endParaRPr lang="en-US"/>
           </a:p>
@@ -1572,7 +1584,7 @@
           <a:p>
             <a:fld id="{75E77AAE-2F44-5C47-B387-1EEC3C22D174}" type="datetimeFigureOut">
               <a:rPr lang="en-US" smtClean="0"/>
-              <a:t>10/14/26</a:t>
+              <a:t>10/18/26</a:t>
             </a:fld>
             <a:endParaRPr lang="en-US"/>
           </a:p>
@@ -1780,7 +1792,7 @@
           <a:p>
             <a:fld id="{75E77AAE-2F44-5C47-B387-1EEC3C22D174}" type="datetimeFigureOut">
               <a:rPr lang="en-US" smtClean="0"/>
-              <a:t>10/14/26</a:t>
+              <a:t>10/18/26</a:t>
             </a:fld>
             <a:endParaRPr lang="en-US"/>
           </a:p>
@@ -1978,7 +1990,7 @@
           <a:p>
             <a:fld id="{75E77AAE-2F44-5C47-B387-1EEC3C22D174}" type="datetimeFigureOut">
               <a:rPr lang="en-US" smtClean="0"/>
-              <a:t>10/14/26</a:t>
+              <a:t>10/18/26</a:t>
             </a:fld>
             <a:endParaRPr lang="en-US"/>
           </a:p>
@@ -2253,7 +2265,7 @@
           <a:p>
             <a:fld id="{75E77AAE-2F44-5C47-B387-1EEC3C22D174}" type="datetimeFigureOut">
               <a:rPr lang="en-US" smtClean="0"/>
-              <a:t>10/14/26</a:t>
+              <a:t>10/18/26</a:t>
             </a:fld>
             <a:endParaRPr lang="en-US"/>
           </a:p>
@@ -2518,7 +2530,7 @@
           <a:p>
             <a:fld id="{75E77AAE-2F44-5C47-B387-1EEC3C22D174}" type="datetimeFigureOut">
               <a:rPr lang="en-US" smtClean="0"/>
-              <a:t>10/14/26</a:t>
+              <a:t>10/18/26</a:t>
             </a:fld>
             <a:endParaRPr lang="en-US"/>
           </a:p>
@@ -2930,7 +2942,7 @@
           <a:p>
             <a:fld id="{75E77AAE-2F44-5C47-B387-1EEC3C22D174}" type="datetimeFigureOut">
               <a:rPr lang="en-US" smtClean="0"/>
-              <a:t>10/14/26</a:t>
+              <a:t>10/18/26</a:t>
             </a:fld>
             <a:endParaRPr lang="en-US"/>
           </a:p>
@@ -3071,7 +3083,7 @@
           <a:p>
             <a:fld id="{75E77AAE-2F44-5C47-B387-1EEC3C22D174}" type="datetimeFigureOut">
               <a:rPr lang="en-US" smtClean="0"/>
-              <a:t>10/14/26</a:t>
+              <a:t>10/18/26</a:t>
             </a:fld>
             <a:endParaRPr lang="en-US"/>
           </a:p>
@@ -3184,7 +3196,7 @@
           <a:p>
             <a:fld id="{75E77AAE-2F44-5C47-B387-1EEC3C22D174}" type="datetimeFigureOut">
               <a:rPr lang="en-US" smtClean="0"/>
-              <a:t>10/14/26</a:t>
+              <a:t>10/18/26</a:t>
             </a:fld>
             <a:endParaRPr lang="en-US"/>
           </a:p>
@@ -3495,7 +3507,7 @@
           <a:p>
             <a:fld id="{75E77AAE-2F44-5C47-B387-1EEC3C22D174}" type="datetimeFigureOut">
               <a:rPr lang="en-US" smtClean="0"/>
-              <a:t>10/14/26</a:t>
+              <a:t>10/18/26</a:t>
             </a:fld>
             <a:endParaRPr lang="en-US"/>
           </a:p>
@@ -3783,7 +3795,7 @@
           <a:p>
             <a:fld id="{75E77AAE-2F44-5C47-B387-1EEC3C22D174}" type="datetimeFigureOut">
               <a:rPr lang="en-US" smtClean="0"/>
-              <a:t>10/14/26</a:t>
+              <a:t>10/18/26</a:t>
             </a:fld>
             <a:endParaRPr lang="en-US"/>
           </a:p>
@@ -4024,7 +4036,7 @@
           <a:p>
             <a:fld id="{75E77AAE-2F44-5C47-B387-1EEC3C22D174}" type="datetimeFigureOut">
               <a:rPr lang="en-US" smtClean="0"/>
-              <a:t>10/14/26</a:t>
+              <a:t>10/18/26</a:t>
             </a:fld>
             <a:endParaRPr lang="en-US"/>
           </a:p>
@@ -5576,6 +5588,66 @@
           </a:prstGeom>
         </p:spPr>
       </p:pic>
+      <p:pic>
+        <p:nvPicPr>
+          <p:cNvPr id="5" name="Picture 4">
+            <a:extLst>
+              <a:ext uri="{FF2B5EF4-FFF2-40B4-BE49-F238E27FC236}">
+                <a16:creationId xmlns:a16="http://schemas.microsoft.com/office/drawing/2014/main" id="{ADAB8061-CB8B-3A12-9F38-18AEE923944F}"/>
+              </a:ext>
+            </a:extLst>
+          </p:cNvPr>
+          <p:cNvPicPr>
+            <a:picLocks noChangeAspect="1"/>
+          </p:cNvPicPr>
+          <p:nvPr/>
+        </p:nvPicPr>
+        <p:blipFill>
+          <a:blip r:embed="rId5"/>
+          <a:stretch>
+            <a:fillRect/>
+          </a:stretch>
+        </p:blipFill>
+        <p:spPr>
+          <a:xfrm>
+            <a:off x="8467403" y="502744"/>
+            <a:ext cx="2832100" cy="1066800"/>
+          </a:xfrm>
+          <a:prstGeom prst="rect">
+            <a:avLst/>
+          </a:prstGeom>
+        </p:spPr>
+      </p:pic>
+      <p:pic>
+        <p:nvPicPr>
+          <p:cNvPr id="6" name="Picture 5">
+            <a:extLst>
+              <a:ext uri="{FF2B5EF4-FFF2-40B4-BE49-F238E27FC236}">
+                <a16:creationId xmlns:a16="http://schemas.microsoft.com/office/drawing/2014/main" id="{CA03CCCE-C115-CFF4-681C-E5938498C163}"/>
+              </a:ext>
+            </a:extLst>
+          </p:cNvPr>
+          <p:cNvPicPr>
+            <a:picLocks noChangeAspect="1"/>
+          </p:cNvPicPr>
+          <p:nvPr/>
+        </p:nvPicPr>
+        <p:blipFill>
+          <a:blip r:embed="rId6"/>
+          <a:stretch>
+            <a:fillRect/>
+          </a:stretch>
+        </p:blipFill>
+        <p:spPr>
+          <a:xfrm>
+            <a:off x="8593318" y="1451723"/>
+            <a:ext cx="2286000" cy="1346200"/>
+          </a:xfrm>
+          <a:prstGeom prst="rect">
+            <a:avLst/>
+          </a:prstGeom>
+        </p:spPr>
+      </p:pic>
     </p:spTree>
     <p:extLst>
       <p:ext uri="{BB962C8B-B14F-4D97-AF65-F5344CB8AC3E}">
@@ -5706,6 +5778,228 @@
       </p:par>
     </p:tnLst>
   </p:timing>
+</p:sld>
+</file>
+
+<file path=ppt/slides/slide15.xml><?xml version="1.0" encoding="utf-8"?>
+<p:sld xmlns:a="http://schemas.openxmlformats.org/drawingml/2006/main" xmlns:r="http://schemas.openxmlformats.org/officeDocument/2006/relationships" xmlns:p="http://schemas.openxmlformats.org/presentationml/2006/main">
+  <p:cSld>
+    <p:spTree>
+      <p:nvGrpSpPr>
+        <p:cNvPr id="1" name="">
+          <a:extLst>
+            <a:ext uri="{FF2B5EF4-FFF2-40B4-BE49-F238E27FC236}">
+              <a16:creationId xmlns:a16="http://schemas.microsoft.com/office/drawing/2014/main" id="{FAE8EFC3-C891-8422-AF19-8E14BC5CD545}"/>
+            </a:ext>
+          </a:extLst>
+        </p:cNvPr>
+        <p:cNvGrpSpPr/>
+        <p:nvPr/>
+      </p:nvGrpSpPr>
+      <p:grpSpPr>
+        <a:xfrm>
+          <a:off x="0" y="0"/>
+          <a:ext cx="0" cy="0"/>
+          <a:chOff x="0" y="0"/>
+          <a:chExt cx="0" cy="0"/>
+        </a:xfrm>
+      </p:grpSpPr>
+      <p:pic>
+        <p:nvPicPr>
+          <p:cNvPr id="2" name="Picture 1">
+            <a:extLst>
+              <a:ext uri="{FF2B5EF4-FFF2-40B4-BE49-F238E27FC236}">
+                <a16:creationId xmlns:a16="http://schemas.microsoft.com/office/drawing/2014/main" id="{634D5A7B-B48C-B681-5217-34F5BFB80D59}"/>
+              </a:ext>
+            </a:extLst>
+          </p:cNvPr>
+          <p:cNvPicPr>
+            <a:picLocks noChangeAspect="1"/>
+          </p:cNvPicPr>
+          <p:nvPr/>
+        </p:nvPicPr>
+        <p:blipFill>
+          <a:blip r:embed="rId2"/>
+          <a:stretch>
+            <a:fillRect/>
+          </a:stretch>
+        </p:blipFill>
+        <p:spPr>
+          <a:xfrm>
+            <a:off x="809625" y="825321"/>
+            <a:ext cx="10357618" cy="1532117"/>
+          </a:xfrm>
+          <a:prstGeom prst="rect">
+            <a:avLst/>
+          </a:prstGeom>
+        </p:spPr>
+      </p:pic>
+      <p:pic>
+        <p:nvPicPr>
+          <p:cNvPr id="3" name="Picture 2">
+            <a:extLst>
+              <a:ext uri="{FF2B5EF4-FFF2-40B4-BE49-F238E27FC236}">
+                <a16:creationId xmlns:a16="http://schemas.microsoft.com/office/drawing/2014/main" id="{AF579BA5-9210-1CC9-4559-5983847BAC38}"/>
+              </a:ext>
+            </a:extLst>
+          </p:cNvPr>
+          <p:cNvPicPr>
+            <a:picLocks noChangeAspect="1"/>
+          </p:cNvPicPr>
+          <p:nvPr/>
+        </p:nvPicPr>
+        <p:blipFill>
+          <a:blip r:embed="rId3"/>
+          <a:stretch>
+            <a:fillRect/>
+          </a:stretch>
+        </p:blipFill>
+        <p:spPr>
+          <a:xfrm>
+            <a:off x="3127375" y="3176589"/>
+            <a:ext cx="3949700" cy="1130300"/>
+          </a:xfrm>
+          <a:prstGeom prst="rect">
+            <a:avLst/>
+          </a:prstGeom>
+        </p:spPr>
+      </p:pic>
+      <p:pic>
+        <p:nvPicPr>
+          <p:cNvPr id="4" name="Picture 3">
+            <a:extLst>
+              <a:ext uri="{FF2B5EF4-FFF2-40B4-BE49-F238E27FC236}">
+                <a16:creationId xmlns:a16="http://schemas.microsoft.com/office/drawing/2014/main" id="{890BB9B1-1245-FF60-778A-27AA8E358FEC}"/>
+              </a:ext>
+            </a:extLst>
+          </p:cNvPr>
+          <p:cNvPicPr>
+            <a:picLocks noChangeAspect="1"/>
+          </p:cNvPicPr>
+          <p:nvPr/>
+        </p:nvPicPr>
+        <p:blipFill>
+          <a:blip r:embed="rId4"/>
+          <a:stretch>
+            <a:fillRect/>
+          </a:stretch>
+        </p:blipFill>
+        <p:spPr>
+          <a:xfrm>
+            <a:off x="1317625" y="2735262"/>
+            <a:ext cx="3784600" cy="381000"/>
+          </a:xfrm>
+          <a:prstGeom prst="rect">
+            <a:avLst/>
+          </a:prstGeom>
+        </p:spPr>
+      </p:pic>
+      <p:pic>
+        <p:nvPicPr>
+          <p:cNvPr id="5" name="Picture 4">
+            <a:extLst>
+              <a:ext uri="{FF2B5EF4-FFF2-40B4-BE49-F238E27FC236}">
+                <a16:creationId xmlns:a16="http://schemas.microsoft.com/office/drawing/2014/main" id="{09941775-267B-23C3-C6A4-209581BD1392}"/>
+              </a:ext>
+            </a:extLst>
+          </p:cNvPr>
+          <p:cNvPicPr>
+            <a:picLocks noChangeAspect="1"/>
+          </p:cNvPicPr>
+          <p:nvPr/>
+        </p:nvPicPr>
+        <p:blipFill>
+          <a:blip r:embed="rId5"/>
+          <a:stretch>
+            <a:fillRect/>
+          </a:stretch>
+        </p:blipFill>
+        <p:spPr>
+          <a:xfrm>
+            <a:off x="1066800" y="4424366"/>
+            <a:ext cx="7772400" cy="527117"/>
+          </a:xfrm>
+          <a:prstGeom prst="rect">
+            <a:avLst/>
+          </a:prstGeom>
+        </p:spPr>
+      </p:pic>
+      <p:pic>
+        <p:nvPicPr>
+          <p:cNvPr id="6" name="Picture 5">
+            <a:extLst>
+              <a:ext uri="{FF2B5EF4-FFF2-40B4-BE49-F238E27FC236}">
+                <a16:creationId xmlns:a16="http://schemas.microsoft.com/office/drawing/2014/main" id="{D9858550-E270-20BD-4040-8D7DE5A2E754}"/>
+              </a:ext>
+            </a:extLst>
+          </p:cNvPr>
+          <p:cNvPicPr>
+            <a:picLocks noChangeAspect="1"/>
+          </p:cNvPicPr>
+          <p:nvPr/>
+        </p:nvPicPr>
+        <p:blipFill>
+          <a:blip r:embed="rId6"/>
+          <a:stretch>
+            <a:fillRect/>
+          </a:stretch>
+        </p:blipFill>
+        <p:spPr>
+          <a:xfrm>
+            <a:off x="3355975" y="5138743"/>
+            <a:ext cx="3721100" cy="952500"/>
+          </a:xfrm>
+          <a:prstGeom prst="rect">
+            <a:avLst/>
+          </a:prstGeom>
+        </p:spPr>
+      </p:pic>
+    </p:spTree>
+    <p:extLst>
+      <p:ext uri="{BB962C8B-B14F-4D97-AF65-F5344CB8AC3E}">
+        <p14:creationId xmlns:p14="http://schemas.microsoft.com/office/powerpoint/2010/main" val="336904915"/>
+      </p:ext>
+    </p:extLst>
+  </p:cSld>
+  <p:clrMapOvr>
+    <a:masterClrMapping/>
+  </p:clrMapOvr>
+</p:sld>
+</file>
+
+<file path=ppt/slides/slide16.xml><?xml version="1.0" encoding="utf-8"?>
+<p:sld xmlns:a="http://schemas.openxmlformats.org/drawingml/2006/main" xmlns:r="http://schemas.openxmlformats.org/officeDocument/2006/relationships" xmlns:p="http://schemas.openxmlformats.org/presentationml/2006/main">
+  <p:cSld>
+    <p:spTree>
+      <p:nvGrpSpPr>
+        <p:cNvPr id="1" name="">
+          <a:extLst>
+            <a:ext uri="{FF2B5EF4-FFF2-40B4-BE49-F238E27FC236}">
+              <a16:creationId xmlns:a16="http://schemas.microsoft.com/office/drawing/2014/main" id="{88059618-CA86-8AE7-8186-95B175D015C2}"/>
+            </a:ext>
+          </a:extLst>
+        </p:cNvPr>
+        <p:cNvGrpSpPr/>
+        <p:nvPr/>
+      </p:nvGrpSpPr>
+      <p:grpSpPr>
+        <a:xfrm>
+          <a:off x="0" y="0"/>
+          <a:ext cx="0" cy="0"/>
+          <a:chOff x="0" y="0"/>
+          <a:chExt cx="0" cy="0"/>
+        </a:xfrm>
+      </p:grpSpPr>
+    </p:spTree>
+    <p:extLst>
+      <p:ext uri="{BB962C8B-B14F-4D97-AF65-F5344CB8AC3E}">
+        <p14:creationId xmlns:p14="http://schemas.microsoft.com/office/powerpoint/2010/main" val="3191824321"/>
+      </p:ext>
+    </p:extLst>
+  </p:cSld>
+  <p:clrMapOvr>
+    <a:masterClrMapping/>
+  </p:clrMapOvr>
 </p:sld>
 </file>
 
